--- a/Thema 4/Practica4_13_classifier/4.13_presentation.pptx
+++ b/Thema 4/Practica4_13_classifier/4.13_presentation.pptx
@@ -931,7 +931,7 @@
               <a:rPr lang="en-US" dirty="0"/>
               <a:t>Порівняв два режими. A — навчається тільки новий шар: 93 % на тесті. B — ще й розморожений layer4: 100 % на тесті з 27 знімків.
 Щоб перевірити чесно, зібрав окремий складний набір — 24 знімки техніки інших типів. Там режим B дає 88 %, режим A — 71 %.
-Помилки показові. MRAP модель назвала вантажівкою з впевненістю 93 %: бронетехніка в навчанні була лише гусеничною, тож колеса й кабіна для неї — ознака вантажівки. Це зсув даних, і це найнебезпечніший тип помилки — висока впевненість. Солдата з квадрокоптером віднесла до бронетехніки: дрон замалий у кадрі.
+Помилки показові. Колісні бронеавтомобілі «Козак-2» модель назвала вантажівкою з впевненістю 97 %: бронетехніка в навчанні була лише гусеничною, тож колеса й кабіна для неї — ознака вантажівки. Це зсув даних, і це найнебезпечніший тип помилки — висока впевненість. Солдата з квадрокоптером віднесла до бронетехніки: дрон замалий у кадрі.
 Висновок: готова модель дає результат на 60 фото за дві хвилини без GPU. Обмеження — малий тест, немає класу «інше», треба додати колісну броню й малі дрони. Код, дані й модель — у репозиторії на GitHub.</a:t>
             </a:r>
             <a:endParaRPr lang="en-US" dirty="0"/>
@@ -3026,7 +3026,7 @@
       </p:sp>
       <p:pic>
         <p:nvPicPr>
-          <p:cNvPr id="10" name="Error photo 1" descr="MRAP → «вантажівка», 93 %">    </p:cNvPr>
+          <p:cNvPr id="10" name="Error photo 1" descr="«Козак-2» → «вантажівка», 97 %">    </p:cNvPr>
           <p:cNvPicPr>
             <a:picLocks noChangeAspect="1"/>
           </p:cNvPicPr>
@@ -3078,7 +3078,7 @@
                   <a:schemeClr val="accent4"/>
                 </a:solidFill>
               </a:rPr>
-              <a:t>MRAP → «вантажівка», 93 %</a:t>
+              <a:t>«Козак-2» → «вантажівка», 97 %</a:t>
             </a:r>
             <a:endParaRPr lang="en-US" sz="1300" dirty="0"/>
           </a:p>
